--- a/media/resources/files/Onduktar_Akcha_KalkulyatorsuzIshtoo_Kabarchy_A5RZ7Hb.pptx
+++ b/media/resources/files/Onduktar_Akcha_KalkulyatorsuzIshtoo_Kabarchy_A5RZ7Hb.pptx
@@ -28922,7 +28922,7 @@
                 <a:ea typeface="+mn-ea"/>
                 <a:cs typeface="+mn-cs"/>
               </a:rPr>
-              <a:t>Турдуу пикирлер учун ыраазычылык билдиребиз.</a:t>
+              <a:t>Түрдүү пикирлер үчүн ыраазычылык билдиребиз.</a:t>
             </a:r>
           </a:p>
           <a:p>

--- a/media/resources/files/Onduktar_Akcha_KalkulyatorsuzIshtoo_Kabarchy_A5RZ7Hb.pptx
+++ b/media/resources/files/Onduktar_Akcha_KalkulyatorsuzIshtoo_Kabarchy_A5RZ7Hb.pptx
@@ -4076,7 +4076,7 @@
                 <a:ea typeface="+mn-ea"/>
                 <a:cs typeface="Arial" panose="020B0604020202020204" pitchFamily="34" charset="0"/>
               </a:rPr>
-              <a:t>Бул конкурстук иш-чарада бир окуучу </a:t>
+              <a:t>Бул жарышта бир окуучу</a:t>
             </a:r>
             <a:r>
               <a:rPr lang="en-US" sz="2000" dirty="0">
@@ -4103,7 +4103,7 @@
                 <a:ea typeface="+mn-ea"/>
                 <a:cs typeface="Arial" panose="020B0604020202020204" pitchFamily="34" charset="0"/>
               </a:rPr>
-              <a:t>2 же андан көп студенттен турган команданын кабарчысы болуп саналат.</a:t>
+              <a:t>2 же андан көп окуучудан турган команданын кабарчысы болот.</a:t>
             </a:r>
           </a:p>
           <a:p>
@@ -6080,7 +6080,7 @@
                   <a:prstClr val="black"/>
                 </a:solidFill>
               </a:rPr>
-              <a:t>158.01 сом</a:t>
+              <a:t>158,01 сом</a:t>
             </a:r>
           </a:p>
           <a:p>
@@ -6154,7 +6154,7 @@
             </a:r>
             <a:r>
               <a:rPr lang="ky-KG" b="1" dirty="0"/>
-              <a:t>293.79 сом</a:t>
+              <a:t>293,79 сом</a:t>
             </a:r>
           </a:p>
           <a:p>
@@ -6300,7 +6300,7 @@
                   <a:prstClr val="black"/>
                 </a:solidFill>
               </a:rPr>
-              <a:t>Ар бири 60.21 сом</a:t>
+              <a:t>Ар бири 60,21 сом</a:t>
             </a:r>
           </a:p>
           <a:p>
@@ -7143,7 +7143,7 @@
                   <a:prstClr val="black"/>
                 </a:solidFill>
               </a:rPr>
-              <a:t>ар бири 30.72</a:t>
+              <a:t>ар бири 30,72</a:t>
             </a:r>
             <a:r>
               <a:rPr lang="en-US" dirty="0">
@@ -7362,7 +7362,7 @@
                   <a:prstClr val="black"/>
                 </a:solidFill>
               </a:rPr>
-              <a:t>ар бири 18.65 сом</a:t>
+              <a:t>ар бири 18,65 сом</a:t>
             </a:r>
           </a:p>
           <a:p>
@@ -8257,7 +8257,7 @@
                   <a:prstClr val="black"/>
                 </a:solidFill>
               </a:rPr>
-              <a:t>200 г сыр 140.59 сом</a:t>
+              <a:t>200 г сыр 140,59 сом</a:t>
             </a:r>
             <a:endParaRPr lang="en-GB" dirty="0">
               <a:solidFill>
@@ -8478,7 +8478,7 @@
                   <a:prstClr val="black"/>
                 </a:solidFill>
               </a:rPr>
-              <a:t>100 г үчүн 305.34 сом</a:t>
+              <a:t>100 г үчүн 305,34 сом</a:t>
             </a:r>
             <a:endParaRPr lang="en-GB" dirty="0">
               <a:solidFill>
@@ -9194,7 +9194,7 @@
                   <a:schemeClr val="tx1"/>
                 </a:solidFill>
               </a:rPr>
-              <a:t>1 транспортир  үчүн 24.16 сом</a:t>
+              <a:t>1 транспортир  үчүн 24,16 сом</a:t>
             </a:r>
           </a:p>
           <a:p>
@@ -9213,7 +9213,7 @@
                   <a:schemeClr val="tx1"/>
                 </a:solidFill>
               </a:rPr>
-              <a:t>10 транспортир үчүн 155.96 сом </a:t>
+              <a:t>10 транспортир үчүн 155,96 сом </a:t>
             </a:r>
             <a:endParaRPr lang="en-GB" sz="1950" dirty="0">
               <a:solidFill>
@@ -9306,7 +9306,7 @@
                   <a:schemeClr val="tx1"/>
                 </a:solidFill>
               </a:rPr>
-              <a:t>1 транспортир үчүн 16.48 сом</a:t>
+              <a:t>1 транспортир үчүн 16,48 сом</a:t>
             </a:r>
           </a:p>
           <a:p>
@@ -9325,7 +9325,7 @@
                   <a:schemeClr val="tx1"/>
                 </a:solidFill>
               </a:rPr>
-              <a:t>20 транспортир үчүн 329.50 сом</a:t>
+              <a:t>20 транспортир үчүн 329,50 сом</a:t>
             </a:r>
             <a:endParaRPr lang="en-GB" sz="1950" dirty="0">
               <a:solidFill>
@@ -9498,7 +9498,7 @@
                   <a:schemeClr val="tx1"/>
                 </a:solidFill>
               </a:rPr>
-              <a:t>1 сызгыч 19.77сом</a:t>
+              <a:t>1 сызгыч 19,77сом</a:t>
             </a:r>
           </a:p>
           <a:p>
@@ -9517,7 +9517,7 @@
                   <a:schemeClr val="tx1"/>
                 </a:solidFill>
               </a:rPr>
-              <a:t>15 сызгыч 252.62 сом</a:t>
+              <a:t>15 сызгыч 252,62 сом</a:t>
             </a:r>
             <a:endParaRPr lang="en-GB" sz="1950" dirty="0">
               <a:solidFill>
@@ -9621,7 +9621,7 @@
                   <a:schemeClr val="tx1"/>
                 </a:solidFill>
               </a:rPr>
-              <a:t>23.07</a:t>
+              <a:t>23,07</a:t>
             </a:r>
             <a:r>
               <a:rPr lang="ky-KG" sz="1950" dirty="0">
@@ -9661,7 +9661,7 @@
                   <a:schemeClr val="tx1"/>
                 </a:solidFill>
               </a:rPr>
-              <a:t>30 сызгыч 499.75 сом</a:t>
+              <a:t>30 сызгыч 499,75 сом</a:t>
             </a:r>
             <a:endParaRPr lang="en-GB" sz="1950" dirty="0">
               <a:solidFill>
@@ -10449,7 +10449,7 @@
                   <a:schemeClr val="tx1"/>
                 </a:solidFill>
               </a:rPr>
-              <a:t>57.11</a:t>
+              <a:t>57,11</a:t>
             </a:r>
             <a:r>
               <a:rPr lang="ky-KG" sz="1950" b="1" dirty="0">
@@ -10586,7 +10586,7 @@
                   <a:schemeClr val="tx1"/>
                 </a:solidFill>
               </a:rPr>
-              <a:t>47.23</a:t>
+              <a:t>47,23</a:t>
             </a:r>
             <a:r>
               <a:rPr lang="ky-KG" sz="1950" b="1" dirty="0">
@@ -10804,7 +10804,7 @@
                   <a:schemeClr val="tx1"/>
                 </a:solidFill>
               </a:rPr>
-              <a:t>1 калькулятор 496.45 сом</a:t>
+              <a:t>1 калькулятор 496,45 сом</a:t>
             </a:r>
           </a:p>
           <a:p>
@@ -10919,7 +10919,7 @@
                   <a:schemeClr val="tx1"/>
                 </a:solidFill>
               </a:rPr>
-              <a:t>1 калькулятор 417.37</a:t>
+              <a:t>1 калькулятор 417,37</a:t>
             </a:r>
           </a:p>
           <a:p>
@@ -11775,7 +11775,7 @@
                             <a:sysClr val="windowText" lastClr="000000"/>
                           </a:solidFill>
                         </a:rPr>
-                        <a:t>Бургер 136.75 с</a:t>
+                        <a:t>Бургер 136,75 с</a:t>
                       </a:r>
                       <a:endParaRPr lang="en-GB" b="0" dirty="0">
                         <a:solidFill>
@@ -11837,7 +11837,7 @@
                             <a:sysClr val="windowText" lastClr="000000"/>
                           </a:solidFill>
                         </a:rPr>
-                        <a:t>Макарон 188.91 с</a:t>
+                        <a:t>Макарон 188,91 с</a:t>
                       </a:r>
                       <a:endParaRPr lang="en-GB" b="0" dirty="0">
                         <a:solidFill>
@@ -11910,7 +11910,7 @@
                             <a:sysClr val="windowText" lastClr="000000"/>
                           </a:solidFill>
                         </a:rPr>
-                        <a:t> 96.65 с</a:t>
+                        <a:t> 96,65 с</a:t>
                       </a:r>
                       <a:endParaRPr lang="en-GB" b="0" dirty="0">
                         <a:solidFill>
@@ -11972,7 +11972,7 @@
                             <a:sysClr val="windowText" lastClr="000000"/>
                           </a:solidFill>
                         </a:rPr>
-                        <a:t>Алма 29.10</a:t>
+                        <a:t>Алма 29,10</a:t>
                       </a:r>
                       <a:endParaRPr lang="en-GB" b="0" dirty="0">
                         <a:solidFill>
@@ -12041,7 +12041,7 @@
                             <a:sysClr val="windowText" lastClr="000000"/>
                           </a:solidFill>
                         </a:rPr>
-                        <a:t>Газдалган суусундук 81.28 с</a:t>
+                        <a:t>Газдалган суусундук 81,28 с</a:t>
                       </a:r>
                       <a:endParaRPr lang="en-GB" b="0" dirty="0">
                         <a:solidFill>
@@ -12103,7 +12103,7 @@
                             <a:sysClr val="windowText" lastClr="000000"/>
                           </a:solidFill>
                         </a:rPr>
-                        <a:t>Шире 88.97 с</a:t>
+                        <a:t>Шире 88,97 с</a:t>
                       </a:r>
                       <a:endParaRPr lang="en-GB" b="0" dirty="0">
                         <a:solidFill>
@@ -12348,7 +12348,7 @@
                             <a:sysClr val="windowText" lastClr="000000"/>
                           </a:solidFill>
                         </a:rPr>
-                        <a:t>Бургер 136.75 с</a:t>
+                        <a:t>Бургер 136,75 с</a:t>
                       </a:r>
                       <a:endParaRPr lang="en-GB" b="0" dirty="0">
                         <a:solidFill>
@@ -12410,7 +12410,7 @@
                             <a:sysClr val="windowText" lastClr="000000"/>
                           </a:solidFill>
                         </a:rPr>
-                        <a:t>Макарон 188.91с</a:t>
+                        <a:t>Макарон 188,91с</a:t>
                       </a:r>
                       <a:endParaRPr lang="en-GB" b="0" dirty="0">
                         <a:solidFill>
@@ -12483,7 +12483,7 @@
                             <a:sysClr val="windowText" lastClr="000000"/>
                           </a:solidFill>
                         </a:rPr>
-                        <a:t> 96.65с</a:t>
+                        <a:t> 96,65с</a:t>
                       </a:r>
                       <a:endParaRPr lang="en-GB" b="0" dirty="0">
                         <a:solidFill>
@@ -12545,7 +12545,7 @@
                             <a:sysClr val="windowText" lastClr="000000"/>
                           </a:solidFill>
                         </a:rPr>
-                        <a:t>Алма 29.10</a:t>
+                        <a:t>Алма 29,10</a:t>
                       </a:r>
                       <a:endParaRPr lang="en-GB" b="0" dirty="0">
                         <a:solidFill>
@@ -12614,7 +12614,7 @@
                             <a:sysClr val="windowText" lastClr="000000"/>
                           </a:solidFill>
                         </a:rPr>
-                        <a:t>Газдалган суусундук 81.28 с</a:t>
+                        <a:t>Газдалган суусундук 81,28 с</a:t>
                       </a:r>
                       <a:endParaRPr lang="en-GB" b="0" dirty="0">
                         <a:solidFill>
@@ -12676,7 +12676,7 @@
                             <a:sysClr val="windowText" lastClr="000000"/>
                           </a:solidFill>
                         </a:rPr>
-                        <a:t>Шире 88.97 с</a:t>
+                        <a:t>Шире 88,97 с</a:t>
                       </a:r>
                       <a:endParaRPr lang="en-GB" b="0" dirty="0">
                         <a:solidFill>
@@ -13518,7 +13518,7 @@
                             <a:sysClr val="windowText" lastClr="000000"/>
                           </a:solidFill>
                         </a:rPr>
-                        <a:t>Бургер 136.75 с</a:t>
+                        <a:t>Бургер 136,75 с</a:t>
                       </a:r>
                       <a:endParaRPr lang="en-GB" b="0" dirty="0">
                         <a:solidFill>
@@ -13580,7 +13580,7 @@
                             <a:sysClr val="windowText" lastClr="000000"/>
                           </a:solidFill>
                         </a:rPr>
-                        <a:t>Макарон 188.91 с</a:t>
+                        <a:t>Макарон 188,91 с</a:t>
                       </a:r>
                       <a:endParaRPr lang="en-GB" b="0" dirty="0">
                         <a:solidFill>
@@ -13653,7 +13653,7 @@
                             <a:sysClr val="windowText" lastClr="000000"/>
                           </a:solidFill>
                         </a:rPr>
-                        <a:t> 96.65 с</a:t>
+                        <a:t> 96,65 с</a:t>
                       </a:r>
                       <a:endParaRPr lang="en-GB" b="0" dirty="0">
                         <a:solidFill>
@@ -13715,7 +13715,7 @@
                             <a:sysClr val="windowText" lastClr="000000"/>
                           </a:solidFill>
                         </a:rPr>
-                        <a:t>Алма 29.10 с</a:t>
+                        <a:t>Алма 29,10 с</a:t>
                       </a:r>
                       <a:endParaRPr lang="en-GB" b="0" dirty="0">
                         <a:solidFill>
@@ -13784,7 +13784,7 @@
                             <a:sysClr val="windowText" lastClr="000000"/>
                           </a:solidFill>
                         </a:rPr>
-                        <a:t>Газдалган суусундук 81.28 с</a:t>
+                        <a:t>Газдалган суусундук 81,28 с</a:t>
                       </a:r>
                       <a:endParaRPr lang="en-GB" b="0" dirty="0">
                         <a:solidFill>
@@ -13846,7 +13846,7 @@
                             <a:sysClr val="windowText" lastClr="000000"/>
                           </a:solidFill>
                         </a:rPr>
-                        <a:t>Шире 88.97 с</a:t>
+                        <a:t>Шире 88,97 с</a:t>
                       </a:r>
                       <a:endParaRPr lang="en-GB" b="0" dirty="0">
                         <a:solidFill>
@@ -13963,7 +13963,7 @@
             <a:pPr algn="ctr"/>
             <a:r>
               <a:rPr lang="ky-KG" dirty="0"/>
-              <a:t>255.94 сом кайтарым алат.</a:t>
+              <a:t>255,94 сом кайтарым алат.</a:t>
             </a:r>
           </a:p>
           <a:p>
@@ -14410,7 +14410,7 @@
                             <a:sysClr val="windowText" lastClr="000000"/>
                           </a:solidFill>
                         </a:rPr>
-                        <a:t>Бургер 136.75 с</a:t>
+                        <a:t>Бургер 136,75 с</a:t>
                       </a:r>
                       <a:endParaRPr lang="en-GB" b="0" dirty="0">
                         <a:solidFill>
@@ -14472,7 +14472,7 @@
                             <a:sysClr val="windowText" lastClr="000000"/>
                           </a:solidFill>
                         </a:rPr>
-                        <a:t>Макарон 188.91 с</a:t>
+                        <a:t>Макарон 188,91 с</a:t>
                       </a:r>
                       <a:endParaRPr lang="en-GB" b="0" dirty="0">
                         <a:solidFill>
@@ -14545,7 +14545,7 @@
                             <a:sysClr val="windowText" lastClr="000000"/>
                           </a:solidFill>
                         </a:rPr>
-                        <a:t> 96.65 с</a:t>
+                        <a:t> 96,65 с</a:t>
                       </a:r>
                       <a:endParaRPr lang="en-GB" b="0" dirty="0">
                         <a:solidFill>
@@ -14607,7 +14607,7 @@
                             <a:sysClr val="windowText" lastClr="000000"/>
                           </a:solidFill>
                         </a:rPr>
-                        <a:t>Алма 29.10</a:t>
+                        <a:t>Алма 29,10</a:t>
                       </a:r>
                       <a:endParaRPr lang="en-GB" b="0" dirty="0">
                         <a:solidFill>
@@ -14676,7 +14676,7 @@
                             <a:sysClr val="windowText" lastClr="000000"/>
                           </a:solidFill>
                         </a:rPr>
-                        <a:t>Газдалган суусундук 81.28 с</a:t>
+                        <a:t>Газдалган суусундук 81,28 с</a:t>
                       </a:r>
                       <a:endParaRPr lang="en-GB" b="0" dirty="0">
                         <a:solidFill>
@@ -14738,7 +14738,7 @@
                             <a:sysClr val="windowText" lastClr="000000"/>
                           </a:solidFill>
                         </a:rPr>
-                        <a:t>Шире 88.97 с</a:t>
+                        <a:t>Шире 88,97 с</a:t>
                       </a:r>
                       <a:endParaRPr lang="en-GB" b="0" dirty="0">
                         <a:solidFill>
@@ -15779,7 +15779,7 @@
                           <a:ea typeface="+mn-ea"/>
                           <a:cs typeface="+mn-cs"/>
                         </a:rPr>
-                        <a:t>28.80сом</a:t>
+                        <a:t>28,80сом</a:t>
                       </a:r>
                       <a:endParaRPr lang="en-GB" sz="2000" dirty="0"/>
                     </a:p>
@@ -16003,7 +16003,7 @@
                           <a:ea typeface="+mn-ea"/>
                           <a:cs typeface="+mn-cs"/>
                         </a:rPr>
-                        <a:t>94.80с</a:t>
+                        <a:t>94,80с</a:t>
                       </a:r>
                       <a:endParaRPr lang="en-GB" sz="2000" dirty="0"/>
                     </a:p>
@@ -16257,7 +16257,7 @@
                           <a:ea typeface="+mn-ea"/>
                           <a:cs typeface="+mn-cs"/>
                         </a:rPr>
-                        <a:t>92.61с</a:t>
+                        <a:t>92,61с</a:t>
                       </a:r>
                       <a:endParaRPr lang="en-GB" sz="2000" dirty="0"/>
                     </a:p>
@@ -16511,7 +16511,7 @@
                           <a:ea typeface="+mn-ea"/>
                           <a:cs typeface="+mn-cs"/>
                         </a:rPr>
-                        <a:t>624.02</a:t>
+                        <a:t>624,02</a:t>
                       </a:r>
                       <a:r>
                         <a:rPr kumimoji="0" lang="ky-KG" sz="3200" b="0" i="0" u="none" strike="noStrike" kern="1200" cap="none" spc="0" normalizeH="0" baseline="0" noProof="0" dirty="0">
@@ -16766,7 +16766,7 @@
                           <a:ea typeface="+mn-ea"/>
                           <a:cs typeface="+mn-cs"/>
                         </a:rPr>
-                        <a:t>644.97</a:t>
+                        <a:t>644,97</a:t>
                       </a:r>
                       <a:endParaRPr lang="en-GB" sz="2000" dirty="0"/>
                     </a:p>
@@ -16990,7 +16990,7 @@
                           <a:ea typeface="+mn-ea"/>
                           <a:cs typeface="+mn-cs"/>
                         </a:rPr>
-                        <a:t>1,497.85</a:t>
+                        <a:t>1 497,85</a:t>
                       </a:r>
                       <a:r>
                         <a:rPr kumimoji="0" lang="ky-KG" sz="3200" b="0" i="0" u="none" strike="noStrike" kern="1200" cap="none" spc="0" normalizeH="0" baseline="0" noProof="0" dirty="0">
@@ -17231,7 +17231,7 @@
                           <a:ea typeface="+mn-ea"/>
                           <a:cs typeface="+mn-cs"/>
                         </a:rPr>
-                        <a:t>250.46</a:t>
+                        <a:t>250,46</a:t>
                       </a:r>
                       <a:r>
                         <a:rPr kumimoji="0" lang="ky-KG" sz="3200" b="0" i="0" u="none" strike="noStrike" kern="1200" cap="none" spc="0" normalizeH="0" baseline="0" noProof="0" dirty="0">
@@ -17488,7 +17488,7 @@
                           <a:ea typeface="+mn-ea"/>
                           <a:cs typeface="+mn-cs"/>
                         </a:rPr>
-                        <a:t>182.8 сом</a:t>
+                        <a:t>182,8 сом</a:t>
                       </a:r>
                       <a:endParaRPr lang="en-GB" sz="2000" dirty="0"/>
                     </a:p>
@@ -17712,7 +17712,7 @@
                           <a:ea typeface="+mn-ea"/>
                           <a:cs typeface="+mn-cs"/>
                         </a:rPr>
-                        <a:t>58.46</a:t>
+                        <a:t>58,46</a:t>
                       </a:r>
                       <a:r>
                         <a:rPr kumimoji="0" lang="ky-KG" sz="3200" b="0" i="0" u="none" strike="noStrike" kern="1200" cap="none" spc="0" normalizeH="0" baseline="0" noProof="0" dirty="0">
@@ -17953,7 +17953,7 @@
                           <a:ea typeface="+mn-ea"/>
                           <a:cs typeface="+mn-cs"/>
                         </a:rPr>
-                        <a:t>1,635</a:t>
+                        <a:t>1 635</a:t>
                       </a:r>
                       <a:r>
                         <a:rPr kumimoji="0" lang="ky-KG" sz="3200" b="0" i="0" u="none" strike="noStrike" kern="1200" cap="none" spc="0" normalizeH="0" baseline="0" noProof="0" dirty="0">
@@ -18194,7 +18194,7 @@
                           <a:ea typeface="+mn-ea"/>
                           <a:cs typeface="+mn-cs"/>
                         </a:rPr>
-                        <a:t>1,065.9</a:t>
+                        <a:t>1 065,9</a:t>
                       </a:r>
                       <a:r>
                         <a:rPr kumimoji="0" lang="ky-KG" sz="3200" b="0" i="0" u="none" strike="noStrike" kern="1200" cap="none" spc="0" normalizeH="0" baseline="0" noProof="0" dirty="0">
@@ -18435,7 +18435,7 @@
                           <a:ea typeface="+mn-ea"/>
                           <a:cs typeface="+mn-cs"/>
                         </a:rPr>
-                        <a:t>632.04</a:t>
+                        <a:t>632,04</a:t>
                       </a:r>
                       <a:r>
                         <a:rPr kumimoji="0" lang="ky-KG" sz="3200" b="0" i="0" u="none" strike="noStrike" kern="1200" cap="none" spc="0" normalizeH="0" baseline="0" noProof="0" dirty="0">
@@ -18970,7 +18970,7 @@
                           <a:ea typeface="+mn-ea"/>
                           <a:cs typeface="+mn-cs"/>
                         </a:rPr>
-                        <a:t>1,355.79</a:t>
+                        <a:t>1 355,79</a:t>
                       </a:r>
                       <a:r>
                         <a:rPr kumimoji="0" lang="ky-KG" sz="3200" b="0" i="0" u="none" strike="noStrike" kern="1200" cap="none" spc="0" normalizeH="0" baseline="0" noProof="0" dirty="0">
@@ -19214,7 +19214,7 @@
                           <a:ea typeface="+mn-ea"/>
                           <a:cs typeface="+mn-cs"/>
                         </a:rPr>
-                        <a:t>184.32</a:t>
+                        <a:t>184,32</a:t>
                       </a:r>
                       <a:r>
                         <a:rPr kumimoji="0" lang="ky-KG" sz="3200" b="0" i="0" u="none" strike="noStrike" kern="1200" cap="none" spc="0" normalizeH="0" baseline="0" noProof="0" dirty="0">
@@ -19455,7 +19455,7 @@
                           <a:ea typeface="+mn-ea"/>
                           <a:cs typeface="+mn-cs"/>
                         </a:rPr>
-                        <a:t>277.65 </a:t>
+                        <a:t>277,65 </a:t>
                       </a:r>
                       <a:r>
                         <a:rPr kumimoji="0" lang="ky-KG" sz="3200" b="0" i="0" u="none" strike="noStrike" kern="1200" cap="none" spc="0" normalizeH="0" baseline="0" noProof="0" dirty="0">
@@ -19712,7 +19712,7 @@
                           <a:ea typeface="+mn-ea"/>
                           <a:cs typeface="+mn-cs"/>
                         </a:rPr>
-                        <a:t>351.47сом</a:t>
+                        <a:t>351,47сом</a:t>
                       </a:r>
                       <a:endParaRPr lang="en-GB" sz="2000" dirty="0"/>
                     </a:p>
@@ -19952,7 +19952,7 @@
                           <a:ea typeface="+mn-ea"/>
                           <a:cs typeface="+mn-cs"/>
                         </a:rPr>
-                        <a:t>458.01 сом</a:t>
+                        <a:t>458,01 сом</a:t>
                       </a:r>
                       <a:endParaRPr lang="en-GB" sz="2000" dirty="0"/>
                     </a:p>
@@ -20390,7 +20390,7 @@
                           <a:ea typeface="+mn-ea"/>
                           <a:cs typeface="+mn-cs"/>
                         </a:rPr>
-                        <a:t>5.52 сом</a:t>
+                        <a:t>5,52 сом</a:t>
                       </a:r>
                       <a:endParaRPr lang="en-GB" sz="2000" dirty="0"/>
                     </a:p>
@@ -20844,7 +20844,7 @@
                           <a:ea typeface="+mn-ea"/>
                           <a:cs typeface="+mn-cs"/>
                         </a:rPr>
-                        <a:t>147.32 сом</a:t>
+                        <a:t>147,32 сом</a:t>
                       </a:r>
                       <a:endParaRPr lang="en-GB" sz="2000" dirty="0"/>
                     </a:p>
@@ -21068,7 +21068,7 @@
                           <a:ea typeface="+mn-ea"/>
                           <a:cs typeface="+mn-cs"/>
                         </a:rPr>
-                        <a:t>247.13 сом</a:t>
+                        <a:t>247,13 сом</a:t>
                       </a:r>
                       <a:endParaRPr lang="en-GB" sz="2000" dirty="0"/>
                     </a:p>
@@ -21292,7 +21292,7 @@
                           <a:ea typeface="+mn-ea"/>
                           <a:cs typeface="+mn-cs"/>
                         </a:rPr>
-                        <a:t>303.1</a:t>
+                        <a:t>303,1</a:t>
                       </a:r>
                       <a:r>
                         <a:rPr kumimoji="0" lang="ky-KG" sz="3200" b="0" i="0" u="none" strike="noStrike" kern="1200" cap="none" spc="0" normalizeH="0" baseline="0" noProof="0" dirty="0">
@@ -21533,7 +21533,7 @@
                           <a:ea typeface="+mn-ea"/>
                           <a:cs typeface="+mn-cs"/>
                         </a:rPr>
-                        <a:t>55.15 сом</a:t>
+                        <a:t>55,15 сом</a:t>
                       </a:r>
                       <a:endParaRPr lang="en-GB" sz="2000" dirty="0"/>
                     </a:p>
@@ -21757,7 +21757,7 @@
                           <a:ea typeface="+mn-ea"/>
                           <a:cs typeface="+mn-cs"/>
                         </a:rPr>
-                        <a:t>11.07</a:t>
+                        <a:t>11,07</a:t>
                       </a:r>
                       <a:r>
                         <a:rPr kumimoji="0" lang="ky-KG" sz="3200" b="0" i="0" u="none" strike="noStrike" kern="1200" cap="none" spc="0" normalizeH="0" baseline="0" noProof="0" dirty="0">
@@ -28074,7 +28074,7 @@
                 <a:ea typeface="+mn-ea"/>
                 <a:cs typeface="Arial" panose="020B0604020202020204" pitchFamily="34" charset="0"/>
               </a:rPr>
-              <a:t>Упайлар системасы менен студенттер тиешелүү суроолорго аракет кыла алышат.</a:t>
+              <a:t>Упайына жараша окуучулар суроо тандап жооп бере алышат.</a:t>
             </a:r>
           </a:p>
           <a:p>
@@ -32462,7 +32462,7 @@
             <a:pPr algn="ctr"/>
             <a:r>
               <a:rPr lang="ky-KG" sz="3200" dirty="0"/>
-              <a:t>47.4</a:t>
+              <a:t>47,4</a:t>
             </a:r>
             <a:endParaRPr lang="en-GB" sz="3200" dirty="0"/>
           </a:p>
@@ -32597,7 +32597,7 @@
             <a:pPr algn="ctr"/>
             <a:r>
               <a:rPr lang="ky-KG" sz="3200" dirty="0"/>
-              <a:t>30.87с</a:t>
+              <a:t>30,87с</a:t>
             </a:r>
             <a:endParaRPr lang="en-GB" sz="3200" dirty="0"/>
           </a:p>
@@ -33388,7 +33388,7 @@
             <a:pPr algn="ctr"/>
             <a:r>
               <a:rPr lang="en-GB" sz="3200" dirty="0"/>
-              <a:t>312.01</a:t>
+              <a:t>312,01</a:t>
             </a:r>
             <a:r>
               <a:rPr lang="ky-KG" sz="3200" dirty="0"/>
@@ -33527,7 +33527,7 @@
             <a:pPr algn="ctr"/>
             <a:r>
               <a:rPr lang="en-GB" sz="3200" dirty="0"/>
-              <a:t>214.99</a:t>
+              <a:t>214,99</a:t>
             </a:r>
             <a:r>
               <a:rPr lang="ky-KG" sz="3200" dirty="0"/>
@@ -34335,7 +34335,7 @@
             <a:pPr algn="ctr"/>
             <a:r>
               <a:rPr lang="en-GB" sz="3200" dirty="0"/>
-              <a:t>299.57 c</a:t>
+              <a:t>299,57 c</a:t>
             </a:r>
           </a:p>
         </p:txBody>
@@ -34469,7 +34469,7 @@
             <a:pPr algn="ctr"/>
             <a:r>
               <a:rPr lang="en-GB" sz="3200" dirty="0"/>
-              <a:t>32.78</a:t>
+              <a:t>32,78</a:t>
             </a:r>
             <a:r>
               <a:rPr lang="ky-KG" sz="3200" dirty="0"/>
@@ -35099,7 +35099,7 @@
             <a:pPr algn="ctr"/>
             <a:r>
               <a:rPr lang="ky-KG" dirty="0"/>
-              <a:t>Ар бир кекс 63.64 сом турат.</a:t>
+              <a:t>Ар бир кекс 63,64 сом турат.</a:t>
             </a:r>
           </a:p>
           <a:p>
@@ -35193,7 +35193,7 @@
             <a:pPr algn="ctr"/>
             <a:r>
               <a:rPr lang="ru-RU" dirty="0"/>
-              <a:t>Ар бир пончиктин баасы 47.18 сом.</a:t>
+              <a:t>Ар бир пончиктин баасы 47,18 сом.</a:t>
             </a:r>
           </a:p>
           <a:p>
